--- a/day2-deck/decks/Productivity Explainer - Preview.pptx
+++ b/day2-deck/decks/Productivity Explainer - Preview.pptx
@@ -1115,7 +1115,7 @@
               <a:buNone/>
             </a:pPr>
             <a:r>
-              <a:rPr lang="en-US" sz="1400" dirty="0">
+              <a:rPr lang="en-US" sz="1500" dirty="0">
                 <a:solidFill>
                   <a:srgbClr val="595959"/>
                 </a:solidFill>
@@ -1123,9 +1123,9 @@
                 <a:ea typeface="Inter" pitchFamily="34" charset="-122"/>
                 <a:cs typeface="Inter" pitchFamily="34" charset="-120"/>
               </a:rPr>
-              <a:t>How much gross and work each person produces: gross per fixed employee, and CP &amp; W ROs per advisor, employee and manager.</a:t>
-            </a:r>
-            <a:endParaRPr lang="en-US" sz="1400" dirty="0"/>
+              <a:t>How much gross and work each person produces: gross per fixed employee and CP &amp; W ROs per fixed employee.</a:t>
+            </a:r>
+            <a:endParaRPr lang="en-US" sz="1500" dirty="0"/>
           </a:p>
         </p:txBody>
       </p:sp>
@@ -1308,7 +1308,7 @@
                 <a:ea typeface="Inter" pitchFamily="34" charset="-122"/>
                 <a:cs typeface="Inter" pitchFamily="34" charset="-120"/>
               </a:rPr>
-              <a:t>ROs per advisor  </a:t>
+              <a:t>ROs per employee  </a:t>
             </a:r>
             <a:pPr algn="ctr" indent="0" marL="0">
               <a:buNone/>
@@ -1322,7 +1322,7 @@
                 <a:ea typeface="Inter" pitchFamily="34" charset="-122"/>
                 <a:cs typeface="Inter" pitchFamily="34" charset="-120"/>
               </a:rPr>
-              <a:t>166 / mo</a:t>
+              <a:t>26.8 / mo</a:t>
             </a:r>
             <a:endParaRPr lang="en-US" sz="1400" dirty="0"/>
           </a:p>
